--- a/gpts_experiment_b/examples/demo_deck_expB.pptx
+++ b/gpts_experiment_b/examples/demo_deck_expB.pptx
@@ -4355,7 +4355,7 @@
         </p:nvSpPr>
         <p:spPr>
           <a:xfrm>
-            <a:off x="548640" y="502920"/>
+            <a:off x="548640" y="475488"/>
             <a:ext cx="82296" cy="457200"/>
           </a:xfrm>
           <a:prstGeom prst="rect">
@@ -4400,7 +4400,7 @@
         <p:spPr>
           <a:xfrm>
             <a:off x="777240" y="411480"/>
-            <a:ext cx="8686800" cy="548640"/>
+            <a:ext cx="8686800" cy="685800"/>
           </a:xfrm>
           <a:prstGeom prst="rect">
             <a:avLst/>
@@ -4415,7 +4415,7 @@
           <a:p>
             <a:pPr algn="l"/>
             <a:r>
-              <a:rPr sz="2400" b="1">
+              <a:rPr sz="3200" b="1">
                 <a:solidFill>
                   <a:srgbClr val="344252"/>
                 </a:solidFill>
@@ -4435,8 +4435,8 @@
         </p:nvSpPr>
         <p:spPr>
           <a:xfrm>
-            <a:off x="804672" y="960120"/>
-            <a:ext cx="8686800" cy="365760"/>
+            <a:off x="804672" y="1051560"/>
+            <a:ext cx="8686800" cy="411480"/>
           </a:xfrm>
           <a:prstGeom prst="rect">
             <a:avLst/>
@@ -4451,7 +4451,7 @@
           <a:p>
             <a:pPr algn="l"/>
             <a:r>
-              <a:rPr sz="1300" b="0">
+              <a:rPr sz="1800" b="0">
                 <a:solidFill>
                   <a:srgbClr val="68727E"/>
                 </a:solidFill>
@@ -4471,8 +4471,8 @@
         </p:nvSpPr>
         <p:spPr>
           <a:xfrm>
-            <a:off x="11247120" y="6355080"/>
-            <a:ext cx="640080" cy="320040"/>
+            <a:off x="11247120" y="6144768"/>
+            <a:ext cx="640080" cy="457200"/>
           </a:xfrm>
           <a:prstGeom prst="rect">
             <a:avLst/>
@@ -4487,14 +4487,14 @@
           <a:p>
             <a:pPr algn="r"/>
             <a:r>
-              <a:rPr sz="1100" b="0">
-                <a:solidFill>
-                  <a:srgbClr val="68727E"/>
+              <a:rPr sz="2800" b="1">
+                <a:solidFill>
+                  <a:srgbClr val="344252"/>
                 </a:solidFill>
                 <a:latin typeface="Microsoft JhengHei"/>
                 <a:ea typeface="Microsoft JhengHei"/>
               </a:rPr>
-              <a:t>03</a:t>
+              <a:t>3</a:t>
             </a:r>
           </a:p>
         </p:txBody>
@@ -4507,8 +4507,8 @@
         </p:nvSpPr>
         <p:spPr>
           <a:xfrm>
-            <a:off x="548640" y="1691640"/>
-            <a:ext cx="3611880" cy="4114800"/>
+            <a:off x="548640" y="1783080"/>
+            <a:ext cx="3511296" cy="3931920"/>
           </a:xfrm>
           <a:prstGeom prst="roundRect">
             <a:avLst>
@@ -4555,12 +4555,12 @@
         </p:nvSpPr>
         <p:spPr>
           <a:xfrm>
-            <a:off x="868680" y="2057400"/>
-            <a:ext cx="2971800" cy="594360"/>
+            <a:off x="868680" y="2148840"/>
+            <a:ext cx="2871216" cy="640080"/>
           </a:xfrm>
           <a:prstGeom prst="roundRect">
             <a:avLst>
-              <a:gd name="adj" fmla="val 50000"/>
+              <a:gd name="adj" fmla="val 8000"/>
             </a:avLst>
           </a:prstGeom>
           <a:solidFill>
@@ -4591,7 +4591,7 @@
           <a:p>
             <a:pPr algn="ctr"/>
             <a:r>
-              <a:rPr sz="1600" b="1">
+              <a:rPr sz="2400" b="1">
                 <a:solidFill>
                   <a:srgbClr val="FFFFFF"/>
                 </a:solidFill>
@@ -4612,7 +4612,7 @@
         <p:spPr>
           <a:xfrm>
             <a:off x="914400" y="3017520"/>
-            <a:ext cx="2926080" cy="2560320"/>
+            <a:ext cx="2779776" cy="2468880"/>
           </a:xfrm>
           <a:prstGeom prst="rect">
             <a:avLst/>
@@ -4685,8 +4685,8 @@
         </p:nvSpPr>
         <p:spPr>
           <a:xfrm>
-            <a:off x="4434840" y="1691640"/>
-            <a:ext cx="3611880" cy="4114800"/>
+            <a:off x="4334256" y="1783080"/>
+            <a:ext cx="3511296" cy="3931920"/>
           </a:xfrm>
           <a:prstGeom prst="roundRect">
             <a:avLst>
@@ -4733,12 +4733,12 @@
         </p:nvSpPr>
         <p:spPr>
           <a:xfrm>
-            <a:off x="4754880" y="2057400"/>
-            <a:ext cx="2971800" cy="594360"/>
+            <a:off x="4654296" y="2148840"/>
+            <a:ext cx="2871216" cy="640080"/>
           </a:xfrm>
           <a:prstGeom prst="roundRect">
             <a:avLst>
-              <a:gd name="adj" fmla="val 50000"/>
+              <a:gd name="adj" fmla="val 8000"/>
             </a:avLst>
           </a:prstGeom>
           <a:solidFill>
@@ -4769,7 +4769,7 @@
           <a:p>
             <a:pPr algn="ctr"/>
             <a:r>
-              <a:rPr sz="1600" b="1">
+              <a:rPr sz="2400" b="1">
                 <a:solidFill>
                   <a:srgbClr val="FFFFFF"/>
                 </a:solidFill>
@@ -4789,8 +4789,8 @@
         </p:nvSpPr>
         <p:spPr>
           <a:xfrm>
-            <a:off x="4800600" y="3017520"/>
-            <a:ext cx="2926080" cy="2560320"/>
+            <a:off x="4700016" y="3017520"/>
+            <a:ext cx="2779776" cy="2468880"/>
           </a:xfrm>
           <a:prstGeom prst="rect">
             <a:avLst/>
@@ -4863,8 +4863,8 @@
         </p:nvSpPr>
         <p:spPr>
           <a:xfrm>
-            <a:off x="8321040" y="1691640"/>
-            <a:ext cx="3611880" cy="4114800"/>
+            <a:off x="8119872" y="1783080"/>
+            <a:ext cx="3511296" cy="3931920"/>
           </a:xfrm>
           <a:prstGeom prst="roundRect">
             <a:avLst>
@@ -4911,12 +4911,12 @@
         </p:nvSpPr>
         <p:spPr>
           <a:xfrm>
-            <a:off x="8641080" y="2057400"/>
-            <a:ext cx="2971800" cy="594360"/>
+            <a:off x="8439912" y="2148840"/>
+            <a:ext cx="2871216" cy="640080"/>
           </a:xfrm>
           <a:prstGeom prst="roundRect">
             <a:avLst>
-              <a:gd name="adj" fmla="val 50000"/>
+              <a:gd name="adj" fmla="val 8000"/>
             </a:avLst>
           </a:prstGeom>
           <a:solidFill>
@@ -4947,7 +4947,7 @@
           <a:p>
             <a:pPr algn="ctr"/>
             <a:r>
-              <a:rPr sz="1600" b="1">
+              <a:rPr sz="2400" b="1">
                 <a:solidFill>
                   <a:srgbClr val="FFFFFF"/>
                 </a:solidFill>
@@ -4967,8 +4967,8 @@
         </p:nvSpPr>
         <p:spPr>
           <a:xfrm>
-            <a:off x="8686800" y="3017520"/>
-            <a:ext cx="2926080" cy="2560320"/>
+            <a:off x="8485632" y="3017520"/>
+            <a:ext cx="2779776" cy="2468880"/>
           </a:xfrm>
           <a:prstGeom prst="rect">
             <a:avLst/>
@@ -5059,7 +5059,7 @@
         </p:nvSpPr>
         <p:spPr>
           <a:xfrm>
-            <a:off x="548640" y="502920"/>
+            <a:off x="548640" y="475488"/>
             <a:ext cx="82296" cy="457200"/>
           </a:xfrm>
           <a:prstGeom prst="rect">
@@ -5104,7 +5104,7 @@
         <p:spPr>
           <a:xfrm>
             <a:off x="777240" y="411480"/>
-            <a:ext cx="8686800" cy="548640"/>
+            <a:ext cx="8686800" cy="685800"/>
           </a:xfrm>
           <a:prstGeom prst="rect">
             <a:avLst/>
@@ -5119,7 +5119,7 @@
           <a:p>
             <a:pPr algn="l"/>
             <a:r>
-              <a:rPr sz="2400" b="1">
+              <a:rPr sz="3200" b="1">
                 <a:solidFill>
                   <a:srgbClr val="344252"/>
                 </a:solidFill>
@@ -5139,8 +5139,8 @@
         </p:nvSpPr>
         <p:spPr>
           <a:xfrm>
-            <a:off x="804672" y="960120"/>
-            <a:ext cx="8686800" cy="365760"/>
+            <a:off x="804672" y="1051560"/>
+            <a:ext cx="8686800" cy="411480"/>
           </a:xfrm>
           <a:prstGeom prst="rect">
             <a:avLst/>
@@ -5155,7 +5155,7 @@
           <a:p>
             <a:pPr algn="l"/>
             <a:r>
-              <a:rPr sz="1300" b="0">
+              <a:rPr sz="1800" b="0">
                 <a:solidFill>
                   <a:srgbClr val="68727E"/>
                 </a:solidFill>
@@ -5175,8 +5175,8 @@
         </p:nvSpPr>
         <p:spPr>
           <a:xfrm>
-            <a:off x="11247120" y="6355080"/>
-            <a:ext cx="640080" cy="320040"/>
+            <a:off x="11247120" y="6144768"/>
+            <a:ext cx="640080" cy="457200"/>
           </a:xfrm>
           <a:prstGeom prst="rect">
             <a:avLst/>
@@ -5191,14 +5191,14 @@
           <a:p>
             <a:pPr algn="r"/>
             <a:r>
-              <a:rPr sz="1100" b="0">
-                <a:solidFill>
-                  <a:srgbClr val="68727E"/>
+              <a:rPr sz="2800" b="1">
+                <a:solidFill>
+                  <a:srgbClr val="344252"/>
                 </a:solidFill>
                 <a:latin typeface="Microsoft JhengHei"/>
                 <a:ea typeface="Microsoft JhengHei"/>
               </a:rPr>
-              <a:t>04</a:t>
+              <a:t>4</a:t>
             </a:r>
           </a:p>
         </p:txBody>
@@ -5211,8 +5211,44 @@
         </p:nvSpPr>
         <p:spPr>
           <a:xfrm>
-            <a:off x="685800" y="2103120"/>
+            <a:off x="548640" y="2194560"/>
             <a:ext cx="3383280" cy="1188720"/>
+          </a:xfrm>
+          <a:prstGeom prst="rect">
+            <a:avLst/>
+          </a:prstGeom>
+          <a:noFill/>
+        </p:spPr>
+        <p:txBody>
+          <a:bodyPr wrap="square" anchor="ctr">
+            <a:spAutoFit/>
+          </a:bodyPr>
+          <a:lstStyle/>
+          <a:p>
+            <a:pPr algn="ctr"/>
+            <a:r>
+              <a:rPr sz="6000" b="1">
+                <a:solidFill>
+                  <a:srgbClr val="58D494"/>
+                </a:solidFill>
+                <a:latin typeface="Microsoft JhengHei"/>
+                <a:ea typeface="Microsoft JhengHei"/>
+              </a:rPr>
+              <a:t>60%</a:t>
+            </a:r>
+          </a:p>
+        </p:txBody>
+      </p:sp>
+      <p:sp>
+        <p:nvSpPr>
+          <p:cNvPr id="7" name="TextBox 6"/>
+          <p:cNvSpPr txBox="1"/>
+          <p:nvPr/>
+        </p:nvSpPr>
+        <p:spPr>
+          <a:xfrm>
+            <a:off x="548640" y="3520440"/>
+            <a:ext cx="3383280" cy="502920"/>
           </a:xfrm>
           <a:prstGeom prst="rect">
             <a:avLst/>
@@ -5227,28 +5263,28 @@
           <a:p>
             <a:pPr algn="ctr"/>
             <a:r>
-              <a:rPr sz="6000" b="1">
-                <a:solidFill>
-                  <a:srgbClr val="58D494"/>
+              <a:rPr sz="1800" b="1">
+                <a:solidFill>
+                  <a:srgbClr val="344252"/>
                 </a:solidFill>
                 <a:latin typeface="Microsoft JhengHei"/>
                 <a:ea typeface="Microsoft JhengHei"/>
               </a:rPr>
-              <a:t>60%</a:t>
-            </a:r>
-          </a:p>
-        </p:txBody>
-      </p:sp>
-      <p:sp>
-        <p:nvSpPr>
-          <p:cNvPr id="7" name="TextBox 6"/>
+              <a:t>自動解決率</a:t>
+            </a:r>
+          </a:p>
+        </p:txBody>
+      </p:sp>
+      <p:sp>
+        <p:nvSpPr>
+          <p:cNvPr id="8" name="TextBox 7"/>
           <p:cNvSpPr txBox="1"/>
           <p:nvPr/>
         </p:nvSpPr>
         <p:spPr>
           <a:xfrm>
-            <a:off x="685800" y="3429000"/>
-            <a:ext cx="3383280" cy="502920"/>
+            <a:off x="548640" y="4069080"/>
+            <a:ext cx="3383280" cy="731520"/>
           </a:xfrm>
           <a:prstGeom prst="rect">
             <a:avLst/>
@@ -5263,28 +5299,64 @@
           <a:p>
             <a:pPr algn="ctr"/>
             <a:r>
-              <a:rPr sz="1800" b="1">
-                <a:solidFill>
-                  <a:srgbClr val="344252"/>
+              <a:rPr sz="1400" b="0">
+                <a:solidFill>
+                  <a:srgbClr val="68727E"/>
                 </a:solidFill>
                 <a:latin typeface="Microsoft JhengHei"/>
                 <a:ea typeface="Microsoft JhengHei"/>
               </a:rPr>
-              <a:t>自動解決率</a:t>
-            </a:r>
-          </a:p>
-        </p:txBody>
-      </p:sp>
-      <p:sp>
-        <p:nvSpPr>
-          <p:cNvPr id="8" name="TextBox 7"/>
+              <a:t>常見問題由 AI 直接結案</a:t>
+            </a:r>
+          </a:p>
+        </p:txBody>
+      </p:sp>
+      <p:sp>
+        <p:nvSpPr>
+          <p:cNvPr id="9" name="TextBox 8"/>
           <p:cNvSpPr txBox="1"/>
           <p:nvPr/>
         </p:nvSpPr>
         <p:spPr>
           <a:xfrm>
-            <a:off x="685800" y="3977639"/>
-            <a:ext cx="3383280" cy="731520"/>
+            <a:off x="4389120" y="2194560"/>
+            <a:ext cx="3383280" cy="1188720"/>
+          </a:xfrm>
+          <a:prstGeom prst="rect">
+            <a:avLst/>
+          </a:prstGeom>
+          <a:noFill/>
+        </p:spPr>
+        <p:txBody>
+          <a:bodyPr wrap="square" anchor="ctr">
+            <a:spAutoFit/>
+          </a:bodyPr>
+          <a:lstStyle/>
+          <a:p>
+            <a:pPr algn="ctr"/>
+            <a:r>
+              <a:rPr sz="6000" b="1">
+                <a:solidFill>
+                  <a:srgbClr val="848BF2"/>
+                </a:solidFill>
+                <a:latin typeface="Microsoft JhengHei"/>
+                <a:ea typeface="Microsoft JhengHei"/>
+              </a:rPr>
+              <a:t>30秒</a:t>
+            </a:r>
+          </a:p>
+        </p:txBody>
+      </p:sp>
+      <p:sp>
+        <p:nvSpPr>
+          <p:cNvPr id="10" name="TextBox 9"/>
+          <p:cNvSpPr txBox="1"/>
+          <p:nvPr/>
+        </p:nvSpPr>
+        <p:spPr>
+          <a:xfrm>
+            <a:off x="4389120" y="3520440"/>
+            <a:ext cx="3383280" cy="502920"/>
           </a:xfrm>
           <a:prstGeom prst="rect">
             <a:avLst/>
@@ -5299,28 +5371,172 @@
           <a:p>
             <a:pPr algn="ctr"/>
             <a:r>
-              <a:rPr sz="1300" b="0">
-                <a:solidFill>
-                  <a:srgbClr val="68727E"/>
+              <a:rPr sz="1800" b="1">
+                <a:solidFill>
+                  <a:srgbClr val="344252"/>
                 </a:solidFill>
                 <a:latin typeface="Microsoft JhengHei"/>
                 <a:ea typeface="Microsoft JhengHei"/>
               </a:rPr>
-              <a:t>常見問題由 AI 直接結案</a:t>
-            </a:r>
-          </a:p>
-        </p:txBody>
-      </p:sp>
-      <p:sp>
-        <p:nvSpPr>
-          <p:cNvPr id="9" name="Rectangle 8"/>
+              <a:t>首次回應時間</a:t>
+            </a:r>
+          </a:p>
+        </p:txBody>
+      </p:sp>
+      <p:sp>
+        <p:nvSpPr>
+          <p:cNvPr id="11" name="TextBox 10"/>
+          <p:cNvSpPr txBox="1"/>
+          <p:nvPr/>
+        </p:nvSpPr>
+        <p:spPr>
+          <a:xfrm>
+            <a:off x="4389120" y="4069080"/>
+            <a:ext cx="3383280" cy="731520"/>
+          </a:xfrm>
+          <a:prstGeom prst="rect">
+            <a:avLst/>
+          </a:prstGeom>
+          <a:noFill/>
+        </p:spPr>
+        <p:txBody>
+          <a:bodyPr wrap="square" anchor="t">
+            <a:spAutoFit/>
+          </a:bodyPr>
+          <a:lstStyle/>
+          <a:p>
+            <a:pPr algn="ctr"/>
+            <a:r>
+              <a:rPr sz="1400" b="0">
+                <a:solidFill>
+                  <a:srgbClr val="68727E"/>
+                </a:solidFill>
+                <a:latin typeface="Microsoft JhengHei"/>
+                <a:ea typeface="Microsoft JhengHei"/>
+              </a:rPr>
+              <a:t>首次回應縮至半分鐘</a:t>
+            </a:r>
+          </a:p>
+        </p:txBody>
+      </p:sp>
+      <p:sp>
+        <p:nvSpPr>
+          <p:cNvPr id="12" name="TextBox 11"/>
+          <p:cNvSpPr txBox="1"/>
+          <p:nvPr/>
+        </p:nvSpPr>
+        <p:spPr>
+          <a:xfrm>
+            <a:off x="8229600" y="2194560"/>
+            <a:ext cx="3383280" cy="1188720"/>
+          </a:xfrm>
+          <a:prstGeom prst="rect">
+            <a:avLst/>
+          </a:prstGeom>
+          <a:noFill/>
+        </p:spPr>
+        <p:txBody>
+          <a:bodyPr wrap="square" anchor="ctr">
+            <a:spAutoFit/>
+          </a:bodyPr>
+          <a:lstStyle/>
+          <a:p>
+            <a:pPr algn="ctr"/>
+            <a:r>
+              <a:rPr sz="6000" b="1">
+                <a:solidFill>
+                  <a:srgbClr val="4AB7F9"/>
+                </a:solidFill>
+                <a:latin typeface="Microsoft JhengHei"/>
+                <a:ea typeface="Microsoft JhengHei"/>
+              </a:rPr>
+              <a:t>+15</a:t>
+            </a:r>
+          </a:p>
+        </p:txBody>
+      </p:sp>
+      <p:sp>
+        <p:nvSpPr>
+          <p:cNvPr id="13" name="TextBox 12"/>
+          <p:cNvSpPr txBox="1"/>
+          <p:nvPr/>
+        </p:nvSpPr>
+        <p:spPr>
+          <a:xfrm>
+            <a:off x="8229600" y="3520440"/>
+            <a:ext cx="3383280" cy="502920"/>
+          </a:xfrm>
+          <a:prstGeom prst="rect">
+            <a:avLst/>
+          </a:prstGeom>
+          <a:noFill/>
+        </p:spPr>
+        <p:txBody>
+          <a:bodyPr wrap="square" anchor="t">
+            <a:spAutoFit/>
+          </a:bodyPr>
+          <a:lstStyle/>
+          <a:p>
+            <a:pPr algn="ctr"/>
+            <a:r>
+              <a:rPr sz="1800" b="1">
+                <a:solidFill>
+                  <a:srgbClr val="344252"/>
+                </a:solidFill>
+                <a:latin typeface="Microsoft JhengHei"/>
+                <a:ea typeface="Microsoft JhengHei"/>
+              </a:rPr>
+              <a:t>滿意度提升</a:t>
+            </a:r>
+          </a:p>
+        </p:txBody>
+      </p:sp>
+      <p:sp>
+        <p:nvSpPr>
+          <p:cNvPr id="14" name="TextBox 13"/>
+          <p:cNvSpPr txBox="1"/>
+          <p:nvPr/>
+        </p:nvSpPr>
+        <p:spPr>
+          <a:xfrm>
+            <a:off x="8229600" y="4069080"/>
+            <a:ext cx="3383280" cy="731520"/>
+          </a:xfrm>
+          <a:prstGeom prst="rect">
+            <a:avLst/>
+          </a:prstGeom>
+          <a:noFill/>
+        </p:spPr>
+        <p:txBody>
+          <a:bodyPr wrap="square" anchor="t">
+            <a:spAutoFit/>
+          </a:bodyPr>
+          <a:lstStyle/>
+          <a:p>
+            <a:pPr algn="ctr"/>
+            <a:r>
+              <a:rPr sz="1400" b="0">
+                <a:solidFill>
+                  <a:srgbClr val="68727E"/>
+                </a:solidFill>
+                <a:latin typeface="Microsoft JhengHei"/>
+                <a:ea typeface="Microsoft JhengHei"/>
+              </a:rPr>
+              <a:t>NPS 預期提升 15 分</a:t>
+            </a:r>
+          </a:p>
+        </p:txBody>
+      </p:sp>
+      <p:sp>
+        <p:nvSpPr>
+          <p:cNvPr id="15" name="Rectangle 14"/>
           <p:cNvSpPr/>
           <p:nvPr/>
         </p:nvSpPr>
         <p:spPr>
           <a:xfrm>
-            <a:off x="4206240" y="2377440"/>
-            <a:ext cx="9525" cy="2011680"/>
+            <a:off x="4160520" y="2468880"/>
+            <a:ext cx="9144" cy="2011680"/>
           </a:xfrm>
           <a:prstGeom prst="rect">
             <a:avLst/>
@@ -5357,122 +5573,14 @@
       </p:sp>
       <p:sp>
         <p:nvSpPr>
-          <p:cNvPr id="10" name="TextBox 9"/>
-          <p:cNvSpPr txBox="1"/>
-          <p:nvPr/>
-        </p:nvSpPr>
-        <p:spPr>
-          <a:xfrm>
-            <a:off x="4480560" y="2103120"/>
-            <a:ext cx="3383280" cy="1188720"/>
-          </a:xfrm>
-          <a:prstGeom prst="rect">
-            <a:avLst/>
-          </a:prstGeom>
-          <a:noFill/>
-        </p:spPr>
-        <p:txBody>
-          <a:bodyPr wrap="square" anchor="t">
-            <a:spAutoFit/>
-          </a:bodyPr>
-          <a:lstStyle/>
-          <a:p>
-            <a:pPr algn="ctr"/>
-            <a:r>
-              <a:rPr sz="6000" b="1">
-                <a:solidFill>
-                  <a:srgbClr val="848BF2"/>
-                </a:solidFill>
-                <a:latin typeface="Microsoft JhengHei"/>
-                <a:ea typeface="Microsoft JhengHei"/>
-              </a:rPr>
-              <a:t>30秒</a:t>
-            </a:r>
-          </a:p>
-        </p:txBody>
-      </p:sp>
-      <p:sp>
-        <p:nvSpPr>
-          <p:cNvPr id="11" name="TextBox 10"/>
-          <p:cNvSpPr txBox="1"/>
-          <p:nvPr/>
-        </p:nvSpPr>
-        <p:spPr>
-          <a:xfrm>
-            <a:off x="4480560" y="3429000"/>
-            <a:ext cx="3383280" cy="502920"/>
-          </a:xfrm>
-          <a:prstGeom prst="rect">
-            <a:avLst/>
-          </a:prstGeom>
-          <a:noFill/>
-        </p:spPr>
-        <p:txBody>
-          <a:bodyPr wrap="square" anchor="t">
-            <a:spAutoFit/>
-          </a:bodyPr>
-          <a:lstStyle/>
-          <a:p>
-            <a:pPr algn="ctr"/>
-            <a:r>
-              <a:rPr sz="1800" b="1">
-                <a:solidFill>
-                  <a:srgbClr val="344252"/>
-                </a:solidFill>
-                <a:latin typeface="Microsoft JhengHei"/>
-                <a:ea typeface="Microsoft JhengHei"/>
-              </a:rPr>
-              <a:t>首次回應時間</a:t>
-            </a:r>
-          </a:p>
-        </p:txBody>
-      </p:sp>
-      <p:sp>
-        <p:nvSpPr>
-          <p:cNvPr id="12" name="TextBox 11"/>
-          <p:cNvSpPr txBox="1"/>
-          <p:nvPr/>
-        </p:nvSpPr>
-        <p:spPr>
-          <a:xfrm>
-            <a:off x="4480560" y="3977639"/>
-            <a:ext cx="3383280" cy="731520"/>
-          </a:xfrm>
-          <a:prstGeom prst="rect">
-            <a:avLst/>
-          </a:prstGeom>
-          <a:noFill/>
-        </p:spPr>
-        <p:txBody>
-          <a:bodyPr wrap="square" anchor="t">
-            <a:spAutoFit/>
-          </a:bodyPr>
-          <a:lstStyle/>
-          <a:p>
-            <a:pPr algn="ctr"/>
-            <a:r>
-              <a:rPr sz="1300" b="0">
-                <a:solidFill>
-                  <a:srgbClr val="68727E"/>
-                </a:solidFill>
-                <a:latin typeface="Microsoft JhengHei"/>
-                <a:ea typeface="Microsoft JhengHei"/>
-              </a:rPr>
-              <a:t>首次回應縮至半分鐘</a:t>
-            </a:r>
-          </a:p>
-        </p:txBody>
-      </p:sp>
-      <p:sp>
-        <p:nvSpPr>
-          <p:cNvPr id="13" name="Rectangle 12"/>
+          <p:cNvPr id="16" name="Rectangle 15"/>
           <p:cNvSpPr/>
           <p:nvPr/>
         </p:nvSpPr>
         <p:spPr>
           <a:xfrm>
-            <a:off x="8001000" y="2377440"/>
-            <a:ext cx="9525" cy="2011680"/>
+            <a:off x="8001000" y="2468880"/>
+            <a:ext cx="9144" cy="2011680"/>
           </a:xfrm>
           <a:prstGeom prst="rect">
             <a:avLst/>
@@ -5504,114 +5612,6 @@
           <a:lstStyle/>
           <a:p>
             <a:pPr algn="ctr"/>
-          </a:p>
-        </p:txBody>
-      </p:sp>
-      <p:sp>
-        <p:nvSpPr>
-          <p:cNvPr id="14" name="TextBox 13"/>
-          <p:cNvSpPr txBox="1"/>
-          <p:nvPr/>
-        </p:nvSpPr>
-        <p:spPr>
-          <a:xfrm>
-            <a:off x="8275320" y="2103120"/>
-            <a:ext cx="3383280" cy="1188720"/>
-          </a:xfrm>
-          <a:prstGeom prst="rect">
-            <a:avLst/>
-          </a:prstGeom>
-          <a:noFill/>
-        </p:spPr>
-        <p:txBody>
-          <a:bodyPr wrap="square" anchor="t">
-            <a:spAutoFit/>
-          </a:bodyPr>
-          <a:lstStyle/>
-          <a:p>
-            <a:pPr algn="ctr"/>
-            <a:r>
-              <a:rPr sz="6000" b="1">
-                <a:solidFill>
-                  <a:srgbClr val="4AB7F9"/>
-                </a:solidFill>
-                <a:latin typeface="Microsoft JhengHei"/>
-                <a:ea typeface="Microsoft JhengHei"/>
-              </a:rPr>
-              <a:t>+15</a:t>
-            </a:r>
-          </a:p>
-        </p:txBody>
-      </p:sp>
-      <p:sp>
-        <p:nvSpPr>
-          <p:cNvPr id="15" name="TextBox 14"/>
-          <p:cNvSpPr txBox="1"/>
-          <p:nvPr/>
-        </p:nvSpPr>
-        <p:spPr>
-          <a:xfrm>
-            <a:off x="8275320" y="3429000"/>
-            <a:ext cx="3383280" cy="502920"/>
-          </a:xfrm>
-          <a:prstGeom prst="rect">
-            <a:avLst/>
-          </a:prstGeom>
-          <a:noFill/>
-        </p:spPr>
-        <p:txBody>
-          <a:bodyPr wrap="square" anchor="t">
-            <a:spAutoFit/>
-          </a:bodyPr>
-          <a:lstStyle/>
-          <a:p>
-            <a:pPr algn="ctr"/>
-            <a:r>
-              <a:rPr sz="1800" b="1">
-                <a:solidFill>
-                  <a:srgbClr val="344252"/>
-                </a:solidFill>
-                <a:latin typeface="Microsoft JhengHei"/>
-                <a:ea typeface="Microsoft JhengHei"/>
-              </a:rPr>
-              <a:t>滿意度提升</a:t>
-            </a:r>
-          </a:p>
-        </p:txBody>
-      </p:sp>
-      <p:sp>
-        <p:nvSpPr>
-          <p:cNvPr id="16" name="TextBox 15"/>
-          <p:cNvSpPr txBox="1"/>
-          <p:nvPr/>
-        </p:nvSpPr>
-        <p:spPr>
-          <a:xfrm>
-            <a:off x="8275320" y="3977639"/>
-            <a:ext cx="3383280" cy="731520"/>
-          </a:xfrm>
-          <a:prstGeom prst="rect">
-            <a:avLst/>
-          </a:prstGeom>
-          <a:noFill/>
-        </p:spPr>
-        <p:txBody>
-          <a:bodyPr wrap="square" anchor="t">
-            <a:spAutoFit/>
-          </a:bodyPr>
-          <a:lstStyle/>
-          <a:p>
-            <a:pPr algn="ctr"/>
-            <a:r>
-              <a:rPr sz="1300" b="0">
-                <a:solidFill>
-                  <a:srgbClr val="68727E"/>
-                </a:solidFill>
-                <a:latin typeface="Microsoft JhengHei"/>
-                <a:ea typeface="Microsoft JhengHei"/>
-              </a:rPr>
-              <a:t>NPS 預期提升 15 分</a:t>
-            </a:r>
           </a:p>
         </p:txBody>
       </p:sp>
@@ -5641,7 +5641,7 @@
         </p:nvSpPr>
         <p:spPr>
           <a:xfrm>
-            <a:off x="548640" y="502920"/>
+            <a:off x="548640" y="475488"/>
             <a:ext cx="82296" cy="457200"/>
           </a:xfrm>
           <a:prstGeom prst="rect">
@@ -5686,7 +5686,7 @@
         <p:spPr>
           <a:xfrm>
             <a:off x="777240" y="411480"/>
-            <a:ext cx="8686800" cy="548640"/>
+            <a:ext cx="8686800" cy="685800"/>
           </a:xfrm>
           <a:prstGeom prst="rect">
             <a:avLst/>
@@ -5701,7 +5701,7 @@
           <a:p>
             <a:pPr algn="l"/>
             <a:r>
-              <a:rPr sz="2400" b="1">
+              <a:rPr sz="3200" b="1">
                 <a:solidFill>
                   <a:srgbClr val="344252"/>
                 </a:solidFill>
@@ -5721,8 +5721,8 @@
         </p:nvSpPr>
         <p:spPr>
           <a:xfrm>
-            <a:off x="804672" y="960120"/>
-            <a:ext cx="8686800" cy="365760"/>
+            <a:off x="804672" y="1051560"/>
+            <a:ext cx="8686800" cy="411480"/>
           </a:xfrm>
           <a:prstGeom prst="rect">
             <a:avLst/>
@@ -5737,7 +5737,7 @@
           <a:p>
             <a:pPr algn="l"/>
             <a:r>
-              <a:rPr sz="1300" b="0">
+              <a:rPr sz="1800" b="0">
                 <a:solidFill>
                   <a:srgbClr val="68727E"/>
                 </a:solidFill>
@@ -5757,8 +5757,8 @@
         </p:nvSpPr>
         <p:spPr>
           <a:xfrm>
-            <a:off x="11247120" y="6355080"/>
-            <a:ext cx="640080" cy="320040"/>
+            <a:off x="11247120" y="6144768"/>
+            <a:ext cx="640080" cy="457200"/>
           </a:xfrm>
           <a:prstGeom prst="rect">
             <a:avLst/>
@@ -5773,14 +5773,14 @@
           <a:p>
             <a:pPr algn="r"/>
             <a:r>
-              <a:rPr sz="1100" b="0">
-                <a:solidFill>
-                  <a:srgbClr val="68727E"/>
+              <a:rPr sz="2800" b="1">
+                <a:solidFill>
+                  <a:srgbClr val="344252"/>
                 </a:solidFill>
                 <a:latin typeface="Microsoft JhengHei"/>
                 <a:ea typeface="Microsoft JhengHei"/>
               </a:rPr>
-              <a:t>05</a:t>
+              <a:t>5</a:t>
             </a:r>
           </a:p>
         </p:txBody>
@@ -5794,7 +5794,7 @@
         <p:spPr>
           <a:xfrm>
             <a:off x="914400" y="3931920"/>
-            <a:ext cx="9326880" cy="19050"/>
+            <a:ext cx="9326880" cy="18288"/>
           </a:xfrm>
           <a:prstGeom prst="rect">
             <a:avLst/>
@@ -5837,7 +5837,7 @@
         </p:nvSpPr>
         <p:spPr>
           <a:xfrm>
-            <a:off x="1234440" y="3831336"/>
+            <a:off x="1490472" y="3831336"/>
             <a:ext cx="219456" cy="219456"/>
           </a:xfrm>
           <a:prstGeom prst="ellipse">
@@ -5883,7 +5883,7 @@
         </p:nvSpPr>
         <p:spPr>
           <a:xfrm>
-            <a:off x="685800" y="4160520"/>
+            <a:off x="937259" y="4160520"/>
             <a:ext cx="1325880" cy="365760"/>
           </a:xfrm>
           <a:prstGeom prst="rect">
@@ -5899,7 +5899,7 @@
           <a:p>
             <a:pPr algn="ctr"/>
             <a:r>
-              <a:rPr sz="1300" b="1">
+              <a:rPr sz="1400" b="1">
                 <a:solidFill>
                   <a:srgbClr val="68727E"/>
                 </a:solidFill>
@@ -5919,7 +5919,7 @@
         </p:nvSpPr>
         <p:spPr>
           <a:xfrm>
-            <a:off x="4114800" y="3831336"/>
+            <a:off x="4233672" y="3831336"/>
             <a:ext cx="219456" cy="219456"/>
           </a:xfrm>
           <a:prstGeom prst="ellipse">
@@ -5965,7 +5965,7 @@
         </p:nvSpPr>
         <p:spPr>
           <a:xfrm>
-            <a:off x="3566160" y="4160520"/>
+            <a:off x="3680460" y="4160520"/>
             <a:ext cx="1325880" cy="365760"/>
           </a:xfrm>
           <a:prstGeom prst="rect">
@@ -5981,7 +5981,7 @@
           <a:p>
             <a:pPr algn="ctr"/>
             <a:r>
-              <a:rPr sz="1300" b="1">
+              <a:rPr sz="1400" b="1">
                 <a:solidFill>
                   <a:srgbClr val="68727E"/>
                 </a:solidFill>
@@ -6001,7 +6001,7 @@
         </p:nvSpPr>
         <p:spPr>
           <a:xfrm>
-            <a:off x="6995160" y="3831336"/>
+            <a:off x="6976872" y="3831336"/>
             <a:ext cx="219456" cy="219456"/>
           </a:xfrm>
           <a:prstGeom prst="ellipse">
@@ -6047,7 +6047,7 @@
         </p:nvSpPr>
         <p:spPr>
           <a:xfrm>
-            <a:off x="6446520" y="4160520"/>
+            <a:off x="6423660" y="4160520"/>
             <a:ext cx="1325880" cy="365760"/>
           </a:xfrm>
           <a:prstGeom prst="rect">
@@ -6063,7 +6063,7 @@
           <a:p>
             <a:pPr algn="ctr"/>
             <a:r>
-              <a:rPr sz="1300" b="1">
+              <a:rPr sz="1400" b="1">
                 <a:solidFill>
                   <a:srgbClr val="68727E"/>
                 </a:solidFill>
@@ -6083,7 +6083,7 @@
         </p:nvSpPr>
         <p:spPr>
           <a:xfrm>
-            <a:off x="9875519" y="3831336"/>
+            <a:off x="9720072" y="3831336"/>
             <a:ext cx="219456" cy="219456"/>
           </a:xfrm>
           <a:prstGeom prst="ellipse">
@@ -6129,7 +6129,7 @@
         </p:nvSpPr>
         <p:spPr>
           <a:xfrm>
-            <a:off x="9326879" y="4160520"/>
+            <a:off x="9166860" y="4160520"/>
             <a:ext cx="1325880" cy="365760"/>
           </a:xfrm>
           <a:prstGeom prst="rect">
@@ -6145,7 +6145,7 @@
           <a:p>
             <a:pPr algn="ctr"/>
             <a:r>
-              <a:rPr sz="1300" b="1">
+              <a:rPr sz="1400" b="1">
                 <a:solidFill>
                   <a:srgbClr val="68727E"/>
                 </a:solidFill>
@@ -6165,8 +6165,8 @@
         </p:nvSpPr>
         <p:spPr>
           <a:xfrm>
-            <a:off x="320040" y="2377440"/>
-            <a:ext cx="2103120" cy="1097280"/>
+            <a:off x="548640" y="2377440"/>
+            <a:ext cx="2103120" cy="1188720"/>
           </a:xfrm>
           <a:prstGeom prst="rect">
             <a:avLst/>
@@ -6174,14 +6174,14 @@
           <a:noFill/>
         </p:spPr>
         <p:txBody>
-          <a:bodyPr wrap="square" anchor="t">
+          <a:bodyPr wrap="square" anchor="b">
             <a:spAutoFit/>
           </a:bodyPr>
           <a:lstStyle/>
           <a:p>
             <a:pPr algn="ctr"/>
             <a:r>
-              <a:rPr sz="1500" b="1">
+              <a:rPr sz="2000" b="1">
                 <a:solidFill>
                   <a:srgbClr val="344252"/>
                 </a:solidFill>
@@ -6194,7 +6194,7 @@
           <a:p>
             <a:pPr algn="ctr"/>
             <a:r>
-              <a:rPr sz="1200" b="0">
+              <a:rPr sz="1400" b="0">
                 <a:solidFill>
                   <a:srgbClr val="68727E"/>
                 </a:solidFill>
@@ -6214,8 +6214,8 @@
         </p:nvSpPr>
         <p:spPr>
           <a:xfrm>
-            <a:off x="3200400" y="2377440"/>
-            <a:ext cx="2103120" cy="1097280"/>
+            <a:off x="3291840" y="2377440"/>
+            <a:ext cx="2103120" cy="1188720"/>
           </a:xfrm>
           <a:prstGeom prst="rect">
             <a:avLst/>
@@ -6223,14 +6223,14 @@
           <a:noFill/>
         </p:spPr>
         <p:txBody>
-          <a:bodyPr wrap="square" anchor="t">
+          <a:bodyPr wrap="square" anchor="b">
             <a:spAutoFit/>
           </a:bodyPr>
           <a:lstStyle/>
           <a:p>
             <a:pPr algn="ctr"/>
             <a:r>
-              <a:rPr sz="1500" b="1">
+              <a:rPr sz="2000" b="1">
                 <a:solidFill>
                   <a:srgbClr val="344252"/>
                 </a:solidFill>
@@ -6243,7 +6243,7 @@
           <a:p>
             <a:pPr algn="ctr"/>
             <a:r>
-              <a:rPr sz="1200" b="0">
+              <a:rPr sz="1400" b="0">
                 <a:solidFill>
                   <a:srgbClr val="68727E"/>
                 </a:solidFill>
@@ -6263,8 +6263,8 @@
         </p:nvSpPr>
         <p:spPr>
           <a:xfrm>
-            <a:off x="6080760" y="2377440"/>
-            <a:ext cx="2103120" cy="1097280"/>
+            <a:off x="6035040" y="2377440"/>
+            <a:ext cx="2103120" cy="1188720"/>
           </a:xfrm>
           <a:prstGeom prst="rect">
             <a:avLst/>
@@ -6272,14 +6272,14 @@
           <a:noFill/>
         </p:spPr>
         <p:txBody>
-          <a:bodyPr wrap="square" anchor="t">
+          <a:bodyPr wrap="square" anchor="b">
             <a:spAutoFit/>
           </a:bodyPr>
           <a:lstStyle/>
           <a:p>
             <a:pPr algn="ctr"/>
             <a:r>
-              <a:rPr sz="1500" b="1">
+              <a:rPr sz="2000" b="1">
                 <a:solidFill>
                   <a:srgbClr val="344252"/>
                 </a:solidFill>
@@ -6292,7 +6292,7 @@
           <a:p>
             <a:pPr algn="ctr"/>
             <a:r>
-              <a:rPr sz="1200" b="0">
+              <a:rPr sz="1400" b="0">
                 <a:solidFill>
                   <a:srgbClr val="68727E"/>
                 </a:solidFill>
@@ -6312,8 +6312,8 @@
         </p:nvSpPr>
         <p:spPr>
           <a:xfrm>
-            <a:off x="7680960" y="4892040"/>
-            <a:ext cx="3931920" cy="1188720"/>
+            <a:off x="7680960" y="4709160"/>
+            <a:ext cx="3931920" cy="1005840"/>
           </a:xfrm>
           <a:prstGeom prst="roundRect">
             <a:avLst>
@@ -6360,8 +6360,8 @@
         </p:nvSpPr>
         <p:spPr>
           <a:xfrm>
-            <a:off x="7955279" y="5029200"/>
-            <a:ext cx="3474720" cy="914400"/>
+            <a:off x="7955279" y="4846320"/>
+            <a:ext cx="3474720" cy="777240"/>
           </a:xfrm>
           <a:prstGeom prst="rect">
             <a:avLst/>
@@ -6376,7 +6376,7 @@
           <a:p>
             <a:pPr algn="l"/>
             <a:r>
-              <a:rPr sz="1300" b="1">
+              <a:rPr sz="2000" b="1">
                 <a:solidFill>
                   <a:srgbClr val="344252"/>
                 </a:solidFill>
@@ -6389,7 +6389,7 @@
           <a:p>
             <a:pPr algn="l"/>
             <a:r>
-              <a:rPr sz="1200" b="0">
+              <a:rPr sz="1400" b="0">
                 <a:solidFill>
                   <a:srgbClr val="68727E"/>
                 </a:solidFill>

--- a/gpts_experiment_b/examples/demo_deck_expB.pptx
+++ b/gpts_experiment_b/examples/demo_deck_expB.pptx
@@ -11,12 +11,12 @@
     <p:handoutMasterId r:id="rId66"/>
   </p:handoutMasterIdLst>
   <p:sldIdLst>
-    <p:sldId id="2741" r:id="rId71"/>
-    <p:sldId id="2742" r:id="rId72"/>
-    <p:sldId id="2744" r:id="rId14"/>
-    <p:sldId id="2745" r:id="rId15"/>
-    <p:sldId id="2746" r:id="rId16"/>
-    <p:sldId id="2743" r:id="rId73"/>
+    <p:sldId id="2683" r:id="rId14"/>
+    <p:sldId id="2684" r:id="rId15"/>
+    <p:sldId id="2686" r:id="rId13"/>
+    <p:sldId id="2687" r:id="rId12"/>
+    <p:sldId id="2688" r:id="rId11"/>
+    <p:sldId id="2685" r:id="rId16"/>
   </p:sldIdLst>
   <p:sldSz cx="12192000" cy="6858000"/>
   <p:notesSz cx="6858000" cy="9144000"/>
